--- a/M&A/カンテサンス/承継後に増える仕事と報酬_ノンネーム_20261025.pptx
+++ b/M&A/カンテサンス/承継後に増える仕事と報酬_ノンネーム_20261025.pptx
@@ -908,7 +908,7 @@
                 <a:ea typeface="Calibri" pitchFamily="34" charset="-122"/>
                 <a:cs typeface="Calibri" pitchFamily="34" charset="-120"/>
               </a:rPr>
-              <a:t>事業承継を行う場合の想定（ノンネーム）</a:t>
+              <a:t>事業承継を行う場合の想定</a:t>
             </a:r>
             <a:endParaRPr lang="en-US" sz="1000" dirty="0"/>
           </a:p>
@@ -989,7 +989,7 @@
                 <a:ea typeface="Calibri" pitchFamily="34" charset="-122"/>
                 <a:cs typeface="Calibri" pitchFamily="34" charset="-120"/>
               </a:rPr>
-              <a:t>料理、サービス、お客様への向き合い方は変えません。増えるのは「自分たちの数字で振り返る」仕事です。買い手が過去に承継した老舗レストランで、毎月実際に運用している内容をもとにまとめました。</a:t>
+              <a:t>料理、サービス、お客様への向き合い方は変えません。増えるのは「自分たちの数字で振り返る」、スキルアップを含めた業務です。過去に承継した老舗レストランで、毎月実際に運用している内容をもとにまとめました。</a:t>
             </a:r>
             <a:endParaRPr lang="en-US" sz="1000" dirty="0"/>
           </a:p>
@@ -1069,7 +1069,7 @@
                 <a:ea typeface="Calibri" pitchFamily="34" charset="-122"/>
                 <a:cs typeface="Calibri" pitchFamily="34" charset="-120"/>
               </a:rPr>
-              <a:t>店名・料理・サービス・予約の仕組み／雇用と給与（下がることはありません）／シェフは3年間これまで通り厨房に立つ</a:t>
+              <a:t>店名・料理・サービス・予約の仕組み／雇用と給与（下がることはありません）／シェフはこれまで通り厨房に立つ</a:t>
             </a:r>
             <a:endParaRPr lang="en-US" sz="950" dirty="0"/>
           </a:p>
@@ -1567,7 +1567,7 @@
                           <a:ea typeface="Calibri" pitchFamily="34" charset="-122"/>
                           <a:cs typeface="Calibri" pitchFamily="34" charset="-120"/>
                         </a:rPr>
-                        <a:t>毎日5〜10分</a:t>
+                        <a:t>毎日10分前後</a:t>
                       </a:r>
                       <a:endParaRPr lang="en-US" sz="880" dirty="0">
                         <a:latin typeface="Calibri" charset="0"/>
@@ -1916,7 +1916,7 @@
                           <a:ea typeface="Calibri" pitchFamily="34" charset="-122"/>
                           <a:cs typeface="Calibri" pitchFamily="34" charset="-120"/>
                         </a:rPr>
-                        <a:t>原価表：初回は数日、以降はメニュー変更ごとに2〜3時間</a:t>
+                        <a:t>原価表：初回は数日、以降はメニュー変更ごとに数時間</a:t>
                       </a:r>
                       <a:endParaRPr lang="en-US" sz="880" dirty="0">
                         <a:latin typeface="Calibri" charset="0"/>
@@ -1937,7 +1937,7 @@
                           <a:ea typeface="Calibri" pitchFamily="34" charset="-122"/>
                           <a:cs typeface="Calibri" pitchFamily="34" charset="-120"/>
                         </a:rPr>
-                        <a:t>棚卸：月1回1〜2時間</a:t>
+                        <a:t>棚卸：月1回数時間</a:t>
                       </a:r>
                       <a:endParaRPr lang="en-US" sz="880" dirty="0">
                         <a:latin typeface="Calibri" charset="0"/>
@@ -1958,7 +1958,7 @@
                           <a:ea typeface="Calibri" pitchFamily="34" charset="-122"/>
                           <a:cs typeface="Calibri" pitchFamily="34" charset="-120"/>
                         </a:rPr>
-                        <a:t>ロス記録：毎日数分</a:t>
+                        <a:t>ロス記録：毎日</a:t>
                       </a:r>
                       <a:endParaRPr lang="en-US" sz="880" dirty="0">
                         <a:latin typeface="Calibri" charset="0"/>
@@ -2286,7 +2286,7 @@
                           <a:ea typeface="Calibri" pitchFamily="34" charset="-122"/>
                           <a:cs typeface="Calibri" pitchFamily="34" charset="-120"/>
                         </a:rPr>
-                        <a:t>週1回30分程度</a:t>
+                        <a:t>週1回30〜60分程度</a:t>
                       </a:r>
                       <a:endParaRPr lang="en-US" sz="880" dirty="0">
                         <a:latin typeface="Calibri" charset="0"/>
@@ -2572,7 +2572,7 @@
                           <a:ea typeface="Calibri" pitchFamily="34" charset="-122"/>
                           <a:cs typeface="Calibri" pitchFamily="34" charset="-120"/>
                         </a:rPr>
-                        <a:t>月1回1〜2時間</a:t>
+                        <a:t>月1回数時間（在庫次第）</a:t>
                       </a:r>
                       <a:endParaRPr lang="en-US" sz="880" dirty="0">
                         <a:latin typeface="Calibri" charset="0"/>
@@ -2686,7 +2686,7 @@
                   </a:tcPr>
                 </a:tc>
               </a:tr>
-              <a:tr h="713232">
+              <a:tr h="841248">
                 <a:tc>
                   <a:txBody>
                     <a:bodyPr/>
@@ -2793,7 +2793,7 @@
                           <a:ea typeface="Calibri" pitchFamily="34" charset="-122"/>
                           <a:cs typeface="Calibri" pitchFamily="34" charset="-120"/>
                         </a:rPr>
-                        <a:t>・週1回の短い会議（営業前の空き時間）：売上の進み具合を予算と比べる</a:t>
+                        <a:t>・週1回の短い会議（営業前の空き時間）：売上の進み具合を予算と比べ、トラブルを報告する</a:t>
                       </a:r>
                       <a:endParaRPr lang="en-US" sz="880" dirty="0">
                         <a:latin typeface="Calibri" charset="0"/>
@@ -2814,7 +2814,7 @@
                           <a:ea typeface="Calibri" pitchFamily="34" charset="-122"/>
                           <a:cs typeface="Calibri" pitchFamily="34" charset="-120"/>
                         </a:rPr>
-                        <a:t>・月1回の月次会議：計画と実績の差を、各担当が自分の数字で説明する</a:t>
+                        <a:t>・月1回の月次会議：計画と実績の差を各担当が自分の数字で説明し、翌月以降の行動計画を立てる</a:t>
                       </a:r>
                       <a:endParaRPr lang="en-US" sz="880" dirty="0">
                         <a:latin typeface="Calibri" charset="0"/>
@@ -2879,7 +2879,7 @@
                           <a:ea typeface="Calibri" pitchFamily="34" charset="-122"/>
                           <a:cs typeface="Calibri" pitchFamily="34" charset="-120"/>
                         </a:rPr>
-                        <a:t>週30分</a:t>
+                        <a:t>週30〜45分</a:t>
                       </a:r>
                       <a:endParaRPr lang="en-US" sz="880" dirty="0">
                         <a:latin typeface="Calibri" charset="0"/>
@@ -2900,7 +2900,28 @@
                           <a:ea typeface="Calibri" pitchFamily="34" charset="-122"/>
                           <a:cs typeface="Calibri" pitchFamily="34" charset="-120"/>
                         </a:rPr>
-                        <a:t>月1.5〜2時間</a:t>
+                        <a:t>月2〜3時間</a:t>
+                      </a:r>
+                      <a:endParaRPr lang="en-US" sz="880" dirty="0">
+                        <a:latin typeface="Calibri" charset="0"/>
+                        <a:ea typeface="Calibri" charset="0"/>
+                        <a:cs typeface="Calibri" charset="0"/>
+                      </a:endParaRPr>
+                    </a:p>
+                    <a:p>
+                      <a:pPr indent="0" marL="0">
+                        <a:buNone/>
+                      </a:pPr>
+                      <a:r>
+                        <a:rPr lang="en-US" sz="880" dirty="0">
+                          <a:solidFill>
+                            <a:srgbClr val="1F1A1C"/>
+                          </a:solidFill>
+                          <a:latin typeface="Calibri" pitchFamily="34" charset="0"/>
+                          <a:ea typeface="Calibri" pitchFamily="34" charset="-122"/>
+                          <a:cs typeface="Calibri" pitchFamily="34" charset="-120"/>
+                        </a:rPr>
+                        <a:t>※慣れてきたら減ります</a:t>
                       </a:r>
                       <a:endParaRPr lang="en-US" sz="880" dirty="0">
                         <a:latin typeface="Calibri" charset="0"/>
@@ -3026,7 +3047,7 @@
         </p:nvSpPr>
         <p:spPr>
           <a:xfrm>
-            <a:off x="457200" y="5943600"/>
+            <a:off x="457200" y="6053328"/>
             <a:ext cx="6647688" cy="219456"/>
           </a:xfrm>
           <a:prstGeom prst="rect">
@@ -3051,7 +3072,7 @@
                 <a:ea typeface="Calibri" pitchFamily="34" charset="-122"/>
                 <a:cs typeface="Calibri" pitchFamily="34" charset="-120"/>
               </a:rPr>
-              <a:t>持ち込まないもの：グルメサイトの運用、増席、値引きなどの集客策は求めません（今の運営で十分なため）。</a:t>
+              <a:t>グルメサイトの運用は求めません。一方で、PR・広報にはご協力をお願いします。</a:t>
             </a:r>
             <a:endParaRPr lang="en-US" sz="880" dirty="0"/>
           </a:p>
@@ -3408,7 +3429,7 @@
                 <a:ea typeface="Calibri" pitchFamily="34" charset="-122"/>
                 <a:cs typeface="Calibri" pitchFamily="34" charset="-120"/>
               </a:rPr>
-              <a:t>数字の改善で生まれた利益を、賞与として還元します</a:t>
+              <a:t>数字の改善で生まれた利益を、賞与として還元します（これまで賞与がない方は、半年ごとの評価面談の中で決めます）</a:t>
             </a:r>
             <a:endParaRPr lang="en-US" sz="930" dirty="0"/>
           </a:p>
@@ -3472,7 +3493,7 @@
                 <a:ea typeface="Calibri" pitchFamily="34" charset="-122"/>
                 <a:cs typeface="Calibri" pitchFamily="34" charset="-120"/>
               </a:rPr>
-              <a:t>承継ボーナス</a:t>
+              <a:t>承継時の昇給</a:t>
             </a:r>
             <a:endParaRPr lang="en-US" sz="1000" dirty="0"/>
           </a:p>
@@ -3514,7 +3535,7 @@
                 <a:ea typeface="Calibri" pitchFamily="34" charset="-122"/>
                 <a:cs typeface="Calibri" pitchFamily="34" charset="-120"/>
               </a:rPr>
-              <a:t>3年間の承継を支えてくださった方へお支払いします</a:t>
+              <a:t>3年間の承継を支えてくださった方は、新体制での新しい役職に応じて昇給・昇格します</a:t>
             </a:r>
             <a:endParaRPr lang="en-US" sz="930" dirty="0"/>
           </a:p>
@@ -3620,7 +3641,7 @@
                 <a:ea typeface="Calibri" pitchFamily="34" charset="-122"/>
                 <a:cs typeface="Calibri" pitchFamily="34" charset="-120"/>
               </a:rPr>
-              <a:t>独立を目指す方には、出店などを支援します（過去の承継事例で実績あり）</a:t>
+              <a:t>独立を目指す方には、一定の審査と貢献度に応じて、出店などを支援します</a:t>
             </a:r>
             <a:endParaRPr lang="en-US" sz="930" dirty="0"/>
           </a:p>
@@ -3835,17 +3856,17 @@
               <a:buNone/>
             </a:pPr>
             <a:r>
-              <a:rPr lang="en-US" sz="750" dirty="0">
+              <a:rPr lang="en-US" sz="850" b="1" dirty="0">
                 <a:solidFill>
-                  <a:srgbClr val="6E6368"/>
+                  <a:srgbClr val="9B2C2C"/>
                 </a:solidFill>
                 <a:latin typeface="Calibri" pitchFamily="34" charset="0"/>
                 <a:ea typeface="Calibri" pitchFamily="34" charset="-122"/>
                 <a:cs typeface="Calibri" pitchFamily="34" charset="-120"/>
               </a:rPr>
-              <a:t>社外秘／ご検討用　頻度・時間は目安であり、具体的な進め方は現場と相談して決めます。</a:t>
+              <a:t>※ 頻度・時間は目安です。具体的な進め方は現場と相談して決めるため、上記より前後する可能性があります。</a:t>
             </a:r>
-            <a:endParaRPr lang="en-US" sz="750" dirty="0"/>
+            <a:endParaRPr lang="en-US" sz="850" dirty="0"/>
           </a:p>
         </p:txBody>
       </p:sp>
